--- a/data/employees/EMP094/AST-EMP094-01.pptx
+++ b/data/employees/EMP094/AST-EMP094-01.pptx
@@ -9,6 +9,7 @@
     <p:sldId id="257" r:id="rId8"/>
     <p:sldId id="258" r:id="rId9"/>
     <p:sldId id="259" r:id="rId10"/>
+    <p:sldId id="260" r:id="rId11"/>
   </p:sldIdLst>
   <p:sldSz cx="9144000" cy="6858000" type="screen4x3"/>
   <p:notesSz cx="6858000" cy="9144000"/>
@@ -3098,42 +3099,55 @@
             <a:spLocks noGrp="1"/>
           </p:cNvSpPr>
           <p:nvPr>
-            <p:ph type="ctrTitle"/>
-          </p:nvPr>
-        </p:nvSpPr>
-        <p:spPr/>
-        <p:txBody>
-          <a:bodyPr/>
-          <a:lstStyle/>
-          <a:p>
-            <a:r>
-              <a:t>Project update deck - EMP094</a:t>
-            </a:r>
-          </a:p>
-        </p:txBody>
-      </p:sp>
-      <p:sp>
-        <p:nvSpPr>
-          <p:cNvPr id="3" name="Subtitle 2"/>
-          <p:cNvSpPr>
-            <a:spLocks noGrp="1"/>
-          </p:cNvSpPr>
-          <p:nvPr>
-            <p:ph type="subTitle" idx="1"/>
-          </p:nvPr>
-        </p:nvSpPr>
-        <p:spPr/>
-        <p:txBody>
-          <a:bodyPr/>
-          <a:lstStyle/>
-          <a:p>
-            <a:r>
-              <a:t>Morgan Smith | Specialist | Operations</a:t>
-            </a:r>
-          </a:p>
-          <a:p>
-            <a:r>
-              <a:t>Prepared: 2025-04-06</a:t>
+            <p:ph type="title"/>
+          </p:nvPr>
+        </p:nvSpPr>
+        <p:spPr/>
+        <p:txBody>
+          <a:bodyPr/>
+          <a:lstStyle/>
+          <a:p>
+            <a:r>
+              <a:t>Ast Emp094 01 - EMP094</a:t>
+            </a:r>
+          </a:p>
+        </p:txBody>
+      </p:sp>
+      <p:sp>
+        <p:nvSpPr>
+          <p:cNvPr id="3" name="Content Placeholder 2"/>
+          <p:cNvSpPr>
+            <a:spLocks noGrp="1"/>
+          </p:cNvSpPr>
+          <p:nvPr>
+            <p:ph idx="1"/>
+          </p:nvPr>
+        </p:nvSpPr>
+        <p:spPr/>
+        <p:txBody>
+          <a:bodyPr/>
+          <a:lstStyle/>
+          <a:p>
+            <a:r>
+              <a:t>Slide 1: Executive Summary</a:t>
+            </a:r>
+          </a:p>
+          <a:p>
+            <a:pPr lvl="1"/>
+            <a:r>
+              <a:t>Section 1: Quarterly delivery milestones. EMP094 contributes to ast emp094 01 through recurring collaboration, clear ownership boundaries, and measurable outcomes. The team captures decisions, open issues, and handoffs so that knowledge remains discoverable for future programs.</a:t>
+            </a:r>
+          </a:p>
+          <a:p>
+            <a:pPr lvl="1"/>
+            <a:r>
+              <a:t>Section 2: Knowledge transfer and onboarding. EMP094 contributes to ast emp094 01 through recurring collaboration, clear ownership boundaries, and measurable outcomes. The team captures decisions, open issues, and handoffs so that knowledge remains discoverable for future programs.</a:t>
+            </a:r>
+          </a:p>
+          <a:p>
+            <a:pPr lvl="1"/>
+            <a:r>
+              <a:t>Section 3: Customer escalation analysis. EMP094 contributes to ast emp094 01 through recurring collaboration, clear ownership boundaries, and measurable outcomes. The team captures decisions, open issues, and handoffs so that knowledge remains discoverable for future programs.</a:t>
             </a:r>
           </a:p>
         </p:txBody>
@@ -3172,7 +3186,7 @@
           <a:lstStyle/>
           <a:p>
             <a:r>
-              <a:t>Shift Productivity Dashboard</a:t>
+              <a:t>Ast Emp094 01 - EMP094</a:t>
             </a:r>
           </a:p>
         </p:txBody>
@@ -3193,17 +3207,25 @@
           <a:lstStyle/>
           <a:p>
             <a:r>
-              <a:t>Overview of Shift Productivity Dashboard for Operations department.</a:t>
-            </a:r>
-          </a:p>
-          <a:p>
-            <a:r>
-              <a:t>Responsible: Morgan Smith (Specialist)</a:t>
-            </a:r>
-          </a:p>
-          <a:p>
-            <a:r>
-              <a:t>Location: Austin | Skills: Ontology, MLOps, Azure AI, TypeScript</a:t>
+              <a:t>Slide 2: Executive Summary</a:t>
+            </a:r>
+          </a:p>
+          <a:p>
+            <a:pPr lvl="1"/>
+            <a:r>
+              <a:t>Section 1: Operational risk review. EMP094 contributes to ast emp094 01 through recurring collaboration, clear ownership boundaries, and measurable outcomes. The team captures decisions, open issues, and handoffs so that knowledge remains discoverable for future programs.</a:t>
+            </a:r>
+          </a:p>
+          <a:p>
+            <a:pPr lvl="1"/>
+            <a:r>
+              <a:t>Section 2: Customer escalation analysis. EMP094 contributes to ast emp094 01 through recurring collaboration, clear ownership boundaries, and measurable outcomes. The team captures decisions, open issues, and handoffs so that knowledge remains discoverable for future programs.</a:t>
+            </a:r>
+          </a:p>
+          <a:p>
+            <a:pPr lvl="1"/>
+            <a:r>
+              <a:t>Section 3: Knowledge transfer and onboarding. EMP094 contributes to ast emp094 01 through recurring collaboration, clear ownership boundaries, and measurable outcomes. The team captures decisions, open issues, and handoffs so that knowledge remains discoverable for future programs.</a:t>
             </a:r>
           </a:p>
         </p:txBody>
@@ -3242,7 +3264,7 @@
           <a:lstStyle/>
           <a:p>
             <a:r>
-              <a:t>Throughput vs. Target</a:t>
+              <a:t>Ast Emp094 01 - EMP094</a:t>
             </a:r>
           </a:p>
         </p:txBody>
@@ -3263,17 +3285,25 @@
           <a:lstStyle/>
           <a:p>
             <a:r>
-              <a:t>Overview of Throughput vs. Target for Operations department.</a:t>
-            </a:r>
-          </a:p>
-          <a:p>
-            <a:r>
-              <a:t>Responsible: Morgan Smith (Specialist)</a:t>
-            </a:r>
-          </a:p>
-          <a:p>
-            <a:r>
-              <a:t>Location: Austin | Skills: Ontology, MLOps, Azure AI, TypeScript</a:t>
+              <a:t>Slide 3: Executive Summary</a:t>
+            </a:r>
+          </a:p>
+          <a:p>
+            <a:pPr lvl="1"/>
+            <a:r>
+              <a:t>Section 1: Knowledge transfer and onboarding. EMP094 contributes to ast emp094 01 through recurring collaboration, clear ownership boundaries, and measurable outcomes. The team captures decisions, open issues, and handoffs so that knowledge remains discoverable for future programs.</a:t>
+            </a:r>
+          </a:p>
+          <a:p>
+            <a:pPr lvl="1"/>
+            <a:r>
+              <a:t>Section 2: Knowledge transfer and onboarding. EMP094 contributes to ast emp094 01 through recurring collaboration, clear ownership boundaries, and measurable outcomes. The team captures decisions, open issues, and handoffs so that knowledge remains discoverable for future programs.</a:t>
+            </a:r>
+          </a:p>
+          <a:p>
+            <a:pPr lvl="1"/>
+            <a:r>
+              <a:t>Section 3: Fabric semantic model planning. EMP094 contributes to ast emp094 01 through recurring collaboration, clear ownership boundaries, and measurable outcomes. The team captures decisions, open issues, and handoffs so that knowledge remains discoverable for future programs.</a:t>
             </a:r>
           </a:p>
         </p:txBody>
@@ -3312,7 +3342,7 @@
           <a:lstStyle/>
           <a:p>
             <a:r>
-              <a:t>Incident Response Metrics</a:t>
+              <a:t>Ast Emp094 01 - EMP094</a:t>
             </a:r>
           </a:p>
         </p:txBody>
@@ -3333,17 +3363,103 @@
           <a:lstStyle/>
           <a:p>
             <a:r>
-              <a:t>Overview of Incident Response Metrics for Operations department.</a:t>
-            </a:r>
-          </a:p>
-          <a:p>
-            <a:r>
-              <a:t>Responsible: Morgan Smith (Specialist)</a:t>
-            </a:r>
-          </a:p>
-          <a:p>
-            <a:r>
-              <a:t>Location: Austin | Skills: Ontology, MLOps, Azure AI, TypeScript</a:t>
+              <a:t>Slide 4: Executive Summary</a:t>
+            </a:r>
+          </a:p>
+          <a:p>
+            <a:pPr lvl="1"/>
+            <a:r>
+              <a:t>Section 1: Fabric semantic model planning. EMP094 contributes to ast emp094 01 through recurring collaboration, clear ownership boundaries, and measurable outcomes. The team captures decisions, open issues, and handoffs so that knowledge remains discoverable for future programs.</a:t>
+            </a:r>
+          </a:p>
+          <a:p>
+            <a:pPr lvl="1"/>
+            <a:r>
+              <a:t>Section 2: Department KPI performance. EMP094 contributes to ast emp094 01 through recurring collaboration, clear ownership boundaries, and measurable outcomes. The team captures decisions, open issues, and handoffs so that knowledge remains discoverable for future programs.</a:t>
+            </a:r>
+          </a:p>
+          <a:p>
+            <a:pPr lvl="1"/>
+            <a:r>
+              <a:t>Section 3: Operational risk review. EMP094 contributes to ast emp094 01 through recurring collaboration, clear ownership boundaries, and measurable outcomes. The team captures decisions, open issues, and handoffs so that knowledge remains discoverable for future programs.</a:t>
+            </a:r>
+          </a:p>
+        </p:txBody>
+      </p:sp>
+    </p:spTree>
+  </p:cSld>
+  <p:clrMapOvr>
+    <a:masterClrMapping/>
+  </p:clrMapOvr>
+</p:sld>
+</file>
+
+<file path=ppt/slides/slide5.xml><?xml version="1.0" encoding="utf-8"?>
+<p:sld xmlns:a="http://schemas.openxmlformats.org/drawingml/2006/main" xmlns:p="http://schemas.openxmlformats.org/presentationml/2006/main" xmlns:r="http://schemas.openxmlformats.org/officeDocument/2006/relationships">
+  <p:cSld>
+    <p:spTree>
+      <p:nvGrpSpPr>
+        <p:cNvPr id="1" name=""/>
+        <p:cNvGrpSpPr/>
+        <p:nvPr/>
+      </p:nvGrpSpPr>
+      <p:grpSpPr/>
+      <p:sp>
+        <p:nvSpPr>
+          <p:cNvPr id="2" name="Title 1"/>
+          <p:cNvSpPr>
+            <a:spLocks noGrp="1"/>
+          </p:cNvSpPr>
+          <p:nvPr>
+            <p:ph type="title"/>
+          </p:nvPr>
+        </p:nvSpPr>
+        <p:spPr/>
+        <p:txBody>
+          <a:bodyPr/>
+          <a:lstStyle/>
+          <a:p>
+            <a:r>
+              <a:t>Ast Emp094 01 - EMP094</a:t>
+            </a:r>
+          </a:p>
+        </p:txBody>
+      </p:sp>
+      <p:sp>
+        <p:nvSpPr>
+          <p:cNvPr id="3" name="Content Placeholder 2"/>
+          <p:cNvSpPr>
+            <a:spLocks noGrp="1"/>
+          </p:cNvSpPr>
+          <p:nvPr>
+            <p:ph idx="1"/>
+          </p:nvPr>
+        </p:nvSpPr>
+        <p:spPr/>
+        <p:txBody>
+          <a:bodyPr/>
+          <a:lstStyle/>
+          <a:p>
+            <a:r>
+              <a:t>Slide 5: Executive Summary</a:t>
+            </a:r>
+          </a:p>
+          <a:p>
+            <a:pPr lvl="1"/>
+            <a:r>
+              <a:t>Section 1: Department KPI performance. EMP094 contributes to ast emp094 01 through recurring collaboration, clear ownership boundaries, and measurable outcomes. The team captures decisions, open issues, and handoffs so that knowledge remains discoverable for future programs.</a:t>
+            </a:r>
+          </a:p>
+          <a:p>
+            <a:pPr lvl="1"/>
+            <a:r>
+              <a:t>Section 2: Fabric semantic model planning. EMP094 contributes to ast emp094 01 through recurring collaboration, clear ownership boundaries, and measurable outcomes. The team captures decisions, open issues, and handoffs so that knowledge remains discoverable for future programs.</a:t>
+            </a:r>
+          </a:p>
+          <a:p>
+            <a:pPr lvl="1"/>
+            <a:r>
+              <a:t>Section 3: Department KPI performance. EMP094 contributes to ast emp094 01 through recurring collaboration, clear ownership boundaries, and measurable outcomes. The team captures decisions, open issues, and handoffs so that knowledge remains discoverable for future programs.</a:t>
             </a:r>
           </a:p>
         </p:txBody>
